--- a/pp/Final.pptx
+++ b/pp/Final.pptx
@@ -8,6 +8,7 @@
     <p:sldId id="256" r:id="rId2"/>
     <p:sldId id="257" r:id="rId3"/>
     <p:sldId id="258" r:id="rId4"/>
+    <p:sldId id="259" r:id="rId5"/>
   </p:sldIdLst>
   <p:sldSz cx="12192000" cy="6858000"/>
   <p:notesSz cx="6858000" cy="9144000"/>
@@ -106,6 +107,11 @@
       </a:defRPr>
     </a:lvl9pPr>
   </p:defaultTextStyle>
+  <p:extLst>
+    <p:ext uri="{EFAFB233-063F-42B5-8137-9DF3F51BA10A}">
+      <p15:sldGuideLst xmlns:p15="http://schemas.microsoft.com/office/powerpoint/2012/main"/>
+    </p:ext>
+  </p:extLst>
 </p:presentation>
 </file>
 
@@ -491,7 +497,7 @@
           <a:p>
             <a:fld id="{6B3DA7EA-D769-430C-A3F0-C85C0BA9985D}" type="datetimeFigureOut">
               <a:rPr lang="en-US" smtClean="0"/>
-              <a:t>4/7/2026</a:t>
+              <a:t>4/8/2026</a:t>
             </a:fld>
             <a:endParaRPr lang="en-US"/>
           </a:p>
@@ -689,7 +695,7 @@
           <a:p>
             <a:fld id="{6B3DA7EA-D769-430C-A3F0-C85C0BA9985D}" type="datetimeFigureOut">
               <a:rPr lang="en-US" smtClean="0"/>
-              <a:t>4/7/2026</a:t>
+              <a:t>4/8/2026</a:t>
             </a:fld>
             <a:endParaRPr lang="en-US"/>
           </a:p>
@@ -897,7 +903,7 @@
           <a:p>
             <a:fld id="{6B3DA7EA-D769-430C-A3F0-C85C0BA9985D}" type="datetimeFigureOut">
               <a:rPr lang="en-US" smtClean="0"/>
-              <a:t>4/7/2026</a:t>
+              <a:t>4/8/2026</a:t>
             </a:fld>
             <a:endParaRPr lang="en-US"/>
           </a:p>
@@ -1095,7 +1101,7 @@
           <a:p>
             <a:fld id="{6B3DA7EA-D769-430C-A3F0-C85C0BA9985D}" type="datetimeFigureOut">
               <a:rPr lang="en-US" smtClean="0"/>
-              <a:t>4/7/2026</a:t>
+              <a:t>4/8/2026</a:t>
             </a:fld>
             <a:endParaRPr lang="en-US"/>
           </a:p>
@@ -1370,7 +1376,7 @@
           <a:p>
             <a:fld id="{6B3DA7EA-D769-430C-A3F0-C85C0BA9985D}" type="datetimeFigureOut">
               <a:rPr lang="en-US" smtClean="0"/>
-              <a:t>4/7/2026</a:t>
+              <a:t>4/8/2026</a:t>
             </a:fld>
             <a:endParaRPr lang="en-US"/>
           </a:p>
@@ -1635,7 +1641,7 @@
           <a:p>
             <a:fld id="{6B3DA7EA-D769-430C-A3F0-C85C0BA9985D}" type="datetimeFigureOut">
               <a:rPr lang="en-US" smtClean="0"/>
-              <a:t>4/7/2026</a:t>
+              <a:t>4/8/2026</a:t>
             </a:fld>
             <a:endParaRPr lang="en-US"/>
           </a:p>
@@ -2047,7 +2053,7 @@
           <a:p>
             <a:fld id="{6B3DA7EA-D769-430C-A3F0-C85C0BA9985D}" type="datetimeFigureOut">
               <a:rPr lang="en-US" smtClean="0"/>
-              <a:t>4/7/2026</a:t>
+              <a:t>4/8/2026</a:t>
             </a:fld>
             <a:endParaRPr lang="en-US"/>
           </a:p>
@@ -2188,7 +2194,7 @@
           <a:p>
             <a:fld id="{6B3DA7EA-D769-430C-A3F0-C85C0BA9985D}" type="datetimeFigureOut">
               <a:rPr lang="en-US" smtClean="0"/>
-              <a:t>4/7/2026</a:t>
+              <a:t>4/8/2026</a:t>
             </a:fld>
             <a:endParaRPr lang="en-US"/>
           </a:p>
@@ -2301,7 +2307,7 @@
           <a:p>
             <a:fld id="{6B3DA7EA-D769-430C-A3F0-C85C0BA9985D}" type="datetimeFigureOut">
               <a:rPr lang="en-US" smtClean="0"/>
-              <a:t>4/7/2026</a:t>
+              <a:t>4/8/2026</a:t>
             </a:fld>
             <a:endParaRPr lang="en-US"/>
           </a:p>
@@ -2612,7 +2618,7 @@
           <a:p>
             <a:fld id="{6B3DA7EA-D769-430C-A3F0-C85C0BA9985D}" type="datetimeFigureOut">
               <a:rPr lang="en-US" smtClean="0"/>
-              <a:t>4/7/2026</a:t>
+              <a:t>4/8/2026</a:t>
             </a:fld>
             <a:endParaRPr lang="en-US"/>
           </a:p>
@@ -2900,7 +2906,7 @@
           <a:p>
             <a:fld id="{6B3DA7EA-D769-430C-A3F0-C85C0BA9985D}" type="datetimeFigureOut">
               <a:rPr lang="en-US" smtClean="0"/>
-              <a:t>4/7/2026</a:t>
+              <a:t>4/8/2026</a:t>
             </a:fld>
             <a:endParaRPr lang="en-US"/>
           </a:p>
@@ -3141,7 +3147,7 @@
           <a:p>
             <a:fld id="{6B3DA7EA-D769-430C-A3F0-C85C0BA9985D}" type="datetimeFigureOut">
               <a:rPr lang="en-US" smtClean="0"/>
-              <a:t>4/7/2026</a:t>
+              <a:t>4/8/2026</a:t>
             </a:fld>
             <a:endParaRPr lang="en-US"/>
           </a:p>
@@ -3828,6 +3834,129 @@
 </p:sld>
 </file>
 
+<file path=ppt/slides/slide4.xml><?xml version="1.0" encoding="utf-8"?>
+<p:sld xmlns:a="http://schemas.openxmlformats.org/drawingml/2006/main" xmlns:r="http://schemas.openxmlformats.org/officeDocument/2006/relationships" xmlns:p="http://schemas.openxmlformats.org/presentationml/2006/main">
+  <p:cSld>
+    <p:spTree>
+      <p:nvGrpSpPr>
+        <p:cNvPr id="1" name=""/>
+        <p:cNvGrpSpPr/>
+        <p:nvPr/>
+      </p:nvGrpSpPr>
+      <p:grpSpPr>
+        <a:xfrm>
+          <a:off x="0" y="0"/>
+          <a:ext cx="0" cy="0"/>
+          <a:chOff x="0" y="0"/>
+          <a:chExt cx="0" cy="0"/>
+        </a:xfrm>
+      </p:grpSpPr>
+      <p:sp>
+        <p:nvSpPr>
+          <p:cNvPr id="2" name="Title 1">
+            <a:extLst>
+              <a:ext uri="{FF2B5EF4-FFF2-40B4-BE49-F238E27FC236}">
+                <a16:creationId xmlns:a16="http://schemas.microsoft.com/office/drawing/2014/main" id="{2522BC28-B3A7-5369-4DAC-CCB461A7D01B}"/>
+              </a:ext>
+            </a:extLst>
+          </p:cNvPr>
+          <p:cNvSpPr>
+            <a:spLocks noGrp="1"/>
+          </p:cNvSpPr>
+          <p:nvPr>
+            <p:ph type="title"/>
+          </p:nvPr>
+        </p:nvSpPr>
+        <p:spPr/>
+        <p:txBody>
+          <a:bodyPr/>
+          <a:lstStyle/>
+          <a:p>
+            <a:r>
+              <a:rPr lang="en-US"/>
+              <a:t>Recommendations</a:t>
+            </a:r>
+            <a:endParaRPr lang="en-US" dirty="0"/>
+          </a:p>
+        </p:txBody>
+      </p:sp>
+      <p:sp>
+        <p:nvSpPr>
+          <p:cNvPr id="3" name="Content Placeholder 2">
+            <a:extLst>
+              <a:ext uri="{FF2B5EF4-FFF2-40B4-BE49-F238E27FC236}">
+                <a16:creationId xmlns:a16="http://schemas.microsoft.com/office/drawing/2014/main" id="{9138ACC8-DD96-13D3-C08A-CED35F1FA33B}"/>
+              </a:ext>
+            </a:extLst>
+          </p:cNvPr>
+          <p:cNvSpPr>
+            <a:spLocks noGrp="1"/>
+          </p:cNvSpPr>
+          <p:nvPr>
+            <p:ph idx="1"/>
+          </p:nvPr>
+        </p:nvSpPr>
+        <p:spPr/>
+        <p:txBody>
+          <a:bodyPr/>
+          <a:lstStyle/>
+          <a:p>
+            <a:r>
+              <a:rPr lang="en-US" dirty="0"/>
+              <a:t>More launch sites in the future dedicated to heavy space launch payload missions</a:t>
+            </a:r>
+          </a:p>
+          <a:p>
+            <a:endParaRPr lang="en-US" dirty="0"/>
+          </a:p>
+          <a:p>
+            <a:r>
+              <a:rPr lang="en-US" dirty="0"/>
+              <a:t>More people to support increase of missions(roughly 10 per mission, double if 2 missions are happening at once)</a:t>
+            </a:r>
+          </a:p>
+          <a:p>
+            <a:endParaRPr lang="en-US" dirty="0"/>
+          </a:p>
+          <a:p>
+            <a:r>
+              <a:rPr lang="en-US" dirty="0"/>
+              <a:t>Same level of mission assurance needed(Failures can still happen)</a:t>
+            </a:r>
+          </a:p>
+          <a:p>
+            <a:endParaRPr lang="en-US"/>
+          </a:p>
+          <a:p>
+            <a:endParaRPr lang="en-US" dirty="0"/>
+          </a:p>
+          <a:p>
+            <a:endParaRPr lang="en-US" dirty="0"/>
+          </a:p>
+          <a:p>
+            <a:endParaRPr lang="en-US" dirty="0"/>
+          </a:p>
+          <a:p>
+            <a:endParaRPr lang="en-US" dirty="0"/>
+          </a:p>
+          <a:p>
+            <a:endParaRPr lang="en-US" dirty="0"/>
+          </a:p>
+        </p:txBody>
+      </p:sp>
+    </p:spTree>
+    <p:extLst>
+      <p:ext uri="{BB962C8B-B14F-4D97-AF65-F5344CB8AC3E}">
+        <p14:creationId xmlns:p14="http://schemas.microsoft.com/office/powerpoint/2010/main" val="1632033097"/>
+      </p:ext>
+    </p:extLst>
+  </p:cSld>
+  <p:clrMapOvr>
+    <a:masterClrMapping/>
+  </p:clrMapOvr>
+</p:sld>
+</file>
+
 <file path=ppt/theme/theme1.xml><?xml version="1.0" encoding="utf-8"?>
 <a:theme xmlns:a="http://schemas.openxmlformats.org/drawingml/2006/main" name="Office Theme">
   <a:themeElements>

--- a/pp/Final.pptx
+++ b/pp/Final.pptx
@@ -3912,7 +3912,15 @@
           <a:p>
             <a:r>
               <a:rPr lang="en-US" dirty="0"/>
-              <a:t>More people to support increase of missions(roughly 10 per mission, double if 2 missions are happening at once)</a:t>
+              <a:t>More people to support increase of missions(roughly 10 per mission </a:t>
+            </a:r>
+            <a:r>
+              <a:rPr lang="en-US"/>
+              <a:t>per coast, </a:t>
+            </a:r>
+            <a:r>
+              <a:rPr lang="en-US" dirty="0"/>
+              <a:t>double if 2 missions are happening at once)</a:t>
             </a:r>
           </a:p>
           <a:p>
@@ -3925,7 +3933,7 @@
             </a:r>
           </a:p>
           <a:p>
-            <a:endParaRPr lang="en-US"/>
+            <a:endParaRPr lang="en-US" dirty="0"/>
           </a:p>
           <a:p>
             <a:endParaRPr lang="en-US" dirty="0"/>

--- a/pp/Final.pptx
+++ b/pp/Final.pptx
@@ -3611,7 +3611,9 @@
         </p:nvSpPr>
         <p:spPr/>
         <p:txBody>
-          <a:bodyPr/>
+          <a:bodyPr>
+            <a:normAutofit fontScale="92500" lnSpcReduction="10000"/>
+          </a:bodyPr>
           <a:lstStyle/>
           <a:p>
             <a:r>
@@ -3645,6 +3647,20 @@
               <a:rPr lang="en-US" dirty="0"/>
               <a:t>Why mission assurance standards needs to be kept the same</a:t>
             </a:r>
+          </a:p>
+          <a:p>
+            <a:endParaRPr lang="en-US" dirty="0"/>
+          </a:p>
+          <a:p>
+            <a:r>
+              <a:rPr lang="en-US" dirty="0"/>
+              <a:t>Our recommendations to each squadron to prepare for more </a:t>
+            </a:r>
+            <a:r>
+              <a:rPr lang="en-US"/>
+              <a:t>Space flight</a:t>
+            </a:r>
+            <a:endParaRPr lang="en-US" dirty="0"/>
           </a:p>
           <a:p>
             <a:endParaRPr lang="en-US" dirty="0"/>
